--- a/catalog/samples/heatmap_table.pptx
+++ b/catalog/samples/heatmap_table.pptx
@@ -1922,7 +1922,7 @@
           </a:p>
           <a:p>
             <a:r>
-              <a:t>  "template_sha256": "d0b6c884104c96451bf076ad6a376a0b9759d4c873c2923d1eb4a79dc5d3ea98"</a:t>
+              <a:t>  "template_sha256": "dabb68e9a760c00669da37d400b5fbdc2dbfe5391084983c823255928c67fa5d"</a:t>
             </a:r>
           </a:p>
           <a:p>
